--- a/PPT/01_RNA_Refinement.pptx
+++ b/PPT/01_RNA_Refinement.pptx
@@ -13138,13 +13138,21 @@
           <a:p>
             <a:pPr lvl="1"/>
             <a:r>
-              <a:rPr lang="en-US" altLang="zh-CN"/>
-              <a:t>More Data </a:t>
+              <a:rPr lang="en-US" altLang="zh-CN" dirty="0"/>
+              <a:t>More Data (NAKB)</a:t>
+            </a:r>
+          </a:p>
+          <a:p>
+            <a:pPr lvl="1"/>
+            <a:r>
+              <a:rPr lang="en-US" altLang="zh-CN" dirty="0"/>
+              <a:t>Decoys</a:t>
             </a:r>
             <a:r>
-              <a:rPr lang="en-US" altLang="zh-CN" dirty="0"/>
-              <a:t>(NAKB)</a:t>
+              <a:rPr lang="zh-CN" altLang="en-US"/>
+              <a:t>生成</a:t>
             </a:r>
+            <a:endParaRPr lang="en-US" altLang="zh-CN" dirty="0"/>
           </a:p>
           <a:p>
             <a:endParaRPr lang="zh-CN" altLang="en-US" dirty="0"/>

--- a/PPT/01_RNA_Refinement.pptx
+++ b/PPT/01_RNA_Refinement.pptx
@@ -1226,7 +1226,7 @@
           <a:p>
             <a:fld id="{68BE803F-E891-4F14-A328-E54E4081CF79}" type="datetimeFigureOut">
               <a:rPr lang="zh-CN" altLang="en-US" smtClean="0"/>
-              <a:t>2026/3/11</a:t>
+              <a:t>2026/4/2</a:t>
             </a:fld>
             <a:endParaRPr lang="zh-CN" altLang="en-US"/>
           </a:p>
@@ -1537,10 +1537,6 @@
           <a:bodyPr/>
           <a:lstStyle/>
           <a:p>
-            <a:r>
-              <a:rPr lang="en-US" altLang="zh-CN" dirty="0"/>
-              <a:t>9428</a:t>
-            </a:r>
             <a:endParaRPr lang="zh-CN" altLang="en-US" dirty="0"/>
           </a:p>
         </p:txBody>
@@ -1562,7 +1558,7 @@
           <a:p>
             <a:fld id="{E057DFDE-A632-4726-B802-E42C0FDAE0EE}" type="slidenum">
               <a:rPr lang="zh-CN" altLang="en-US" smtClean="0"/>
-              <a:t>3</a:t>
+              <a:t>1</a:t>
             </a:fld>
             <a:endParaRPr lang="zh-CN" altLang="en-US"/>
           </a:p>
@@ -1571,7 +1567,7 @@
     </p:spTree>
     <p:extLst>
       <p:ext uri="{BB962C8B-B14F-4D97-AF65-F5344CB8AC3E}">
-        <p14:creationId xmlns:p14="http://schemas.microsoft.com/office/powerpoint/2010/main" val="2142211412"/>
+        <p14:creationId xmlns:p14="http://schemas.microsoft.com/office/powerpoint/2010/main" val="1622441083"/>
       </p:ext>
     </p:extLst>
   </p:cSld>
@@ -1626,9 +1622,30 @@
           <a:lstStyle/>
           <a:p>
             <a:r>
+              <a:rPr lang="en-US" altLang="zh-CN" dirty="0"/>
+              <a:t>9428  </a:t>
+            </a:r>
+            <a:r>
               <a:rPr lang="zh-CN" altLang="en-US" dirty="0"/>
-              <a:t>加一下</a:t>
+              <a:t>其实纯</a:t>
             </a:r>
+            <a:r>
+              <a:rPr lang="en-US" altLang="zh-CN" dirty="0"/>
+              <a:t>RNA</a:t>
+            </a:r>
+            <a:r>
+              <a:rPr lang="zh-CN" altLang="en-US" dirty="0"/>
+              <a:t>是</a:t>
+            </a:r>
+            <a:r>
+              <a:rPr lang="en-US" altLang="zh-CN" dirty="0"/>
+              <a:t>1979</a:t>
+            </a:r>
+            <a:r>
+              <a:rPr lang="zh-CN" altLang="en-US"/>
+              <a:t>个</a:t>
+            </a:r>
+            <a:endParaRPr lang="zh-CN" altLang="en-US" dirty="0"/>
           </a:p>
         </p:txBody>
       </p:sp>
@@ -1649,7 +1666,7 @@
           <a:p>
             <a:fld id="{E057DFDE-A632-4726-B802-E42C0FDAE0EE}" type="slidenum">
               <a:rPr lang="zh-CN" altLang="en-US" smtClean="0"/>
-              <a:t>5</a:t>
+              <a:t>3</a:t>
             </a:fld>
             <a:endParaRPr lang="zh-CN" altLang="en-US"/>
           </a:p>
@@ -1658,7 +1675,7 @@
     </p:spTree>
     <p:extLst>
       <p:ext uri="{BB962C8B-B14F-4D97-AF65-F5344CB8AC3E}">
-        <p14:creationId xmlns:p14="http://schemas.microsoft.com/office/powerpoint/2010/main" val="26855718"/>
+        <p14:creationId xmlns:p14="http://schemas.microsoft.com/office/powerpoint/2010/main" val="2142211412"/>
       </p:ext>
     </p:extLst>
   </p:cSld>
@@ -1712,6 +1729,93 @@
           <a:bodyPr/>
           <a:lstStyle/>
           <a:p>
+            <a:r>
+              <a:rPr lang="zh-CN" altLang="en-US" dirty="0"/>
+              <a:t>加一下</a:t>
+            </a:r>
+          </a:p>
+        </p:txBody>
+      </p:sp>
+      <p:sp>
+        <p:nvSpPr>
+          <p:cNvPr id="4" name="灯片编号占位符 3"/>
+          <p:cNvSpPr>
+            <a:spLocks noGrp="1"/>
+          </p:cNvSpPr>
+          <p:nvPr>
+            <p:ph type="sldNum" sz="quarter" idx="5"/>
+          </p:nvPr>
+        </p:nvSpPr>
+        <p:spPr/>
+        <p:txBody>
+          <a:bodyPr/>
+          <a:lstStyle/>
+          <a:p>
+            <a:fld id="{E057DFDE-A632-4726-B802-E42C0FDAE0EE}" type="slidenum">
+              <a:rPr lang="zh-CN" altLang="en-US" smtClean="0"/>
+              <a:t>5</a:t>
+            </a:fld>
+            <a:endParaRPr lang="zh-CN" altLang="en-US"/>
+          </a:p>
+        </p:txBody>
+      </p:sp>
+    </p:spTree>
+    <p:extLst>
+      <p:ext uri="{BB962C8B-B14F-4D97-AF65-F5344CB8AC3E}">
+        <p14:creationId xmlns:p14="http://schemas.microsoft.com/office/powerpoint/2010/main" val="26855718"/>
+      </p:ext>
+    </p:extLst>
+  </p:cSld>
+  <p:clrMapOvr>
+    <a:masterClrMapping/>
+  </p:clrMapOvr>
+</p:notes>
+</file>
+
+<file path=ppt/notesSlides/notesSlide4.xml><?xml version="1.0" encoding="utf-8"?>
+<p:notes xmlns:a="http://schemas.openxmlformats.org/drawingml/2006/main" xmlns:r="http://schemas.openxmlformats.org/officeDocument/2006/relationships" xmlns:p="http://schemas.openxmlformats.org/presentationml/2006/main">
+  <p:cSld>
+    <p:spTree>
+      <p:nvGrpSpPr>
+        <p:cNvPr id="1" name=""/>
+        <p:cNvGrpSpPr/>
+        <p:nvPr/>
+      </p:nvGrpSpPr>
+      <p:grpSpPr>
+        <a:xfrm>
+          <a:off x="0" y="0"/>
+          <a:ext cx="0" cy="0"/>
+          <a:chOff x="0" y="0"/>
+          <a:chExt cx="0" cy="0"/>
+        </a:xfrm>
+      </p:grpSpPr>
+      <p:sp>
+        <p:nvSpPr>
+          <p:cNvPr id="2" name="幻灯片图像占位符 1"/>
+          <p:cNvSpPr>
+            <a:spLocks noGrp="1" noRot="1" noChangeAspect="1"/>
+          </p:cNvSpPr>
+          <p:nvPr>
+            <p:ph type="sldImg"/>
+          </p:nvPr>
+        </p:nvSpPr>
+        <p:spPr/>
+      </p:sp>
+      <p:sp>
+        <p:nvSpPr>
+          <p:cNvPr id="3" name="备注占位符 2"/>
+          <p:cNvSpPr>
+            <a:spLocks noGrp="1"/>
+          </p:cNvSpPr>
+          <p:nvPr>
+            <p:ph type="body" idx="1"/>
+          </p:nvPr>
+        </p:nvSpPr>
+        <p:spPr/>
+        <p:txBody>
+          <a:bodyPr/>
+          <a:lstStyle/>
+          <a:p>
             <a:endParaRPr lang="zh-CN" altLang="en-US" dirty="0"/>
           </a:p>
         </p:txBody>
@@ -1899,7 +2003,7 @@
           <a:p>
             <a:fld id="{CAB93D9D-5A04-45BF-B8B1-4218537275FF}" type="datetimeFigureOut">
               <a:rPr lang="zh-CN" altLang="en-US" smtClean="0"/>
-              <a:t>2026/3/11</a:t>
+              <a:t>2026/4/2</a:t>
             </a:fld>
             <a:endParaRPr lang="zh-CN" altLang="en-US"/>
           </a:p>
@@ -2097,7 +2201,7 @@
           <a:p>
             <a:fld id="{CAB93D9D-5A04-45BF-B8B1-4218537275FF}" type="datetimeFigureOut">
               <a:rPr lang="zh-CN" altLang="en-US" smtClean="0"/>
-              <a:t>2026/3/11</a:t>
+              <a:t>2026/4/2</a:t>
             </a:fld>
             <a:endParaRPr lang="zh-CN" altLang="en-US"/>
           </a:p>
@@ -2305,7 +2409,7 @@
           <a:p>
             <a:fld id="{CAB93D9D-5A04-45BF-B8B1-4218537275FF}" type="datetimeFigureOut">
               <a:rPr lang="zh-CN" altLang="en-US" smtClean="0"/>
-              <a:t>2026/3/11</a:t>
+              <a:t>2026/4/2</a:t>
             </a:fld>
             <a:endParaRPr lang="zh-CN" altLang="en-US"/>
           </a:p>
@@ -2503,7 +2607,7 @@
           <a:p>
             <a:fld id="{CAB93D9D-5A04-45BF-B8B1-4218537275FF}" type="datetimeFigureOut">
               <a:rPr lang="zh-CN" altLang="en-US" smtClean="0"/>
-              <a:t>2026/3/11</a:t>
+              <a:t>2026/4/2</a:t>
             </a:fld>
             <a:endParaRPr lang="zh-CN" altLang="en-US"/>
           </a:p>
@@ -2778,7 +2882,7 @@
           <a:p>
             <a:fld id="{CAB93D9D-5A04-45BF-B8B1-4218537275FF}" type="datetimeFigureOut">
               <a:rPr lang="zh-CN" altLang="en-US" smtClean="0"/>
-              <a:t>2026/3/11</a:t>
+              <a:t>2026/4/2</a:t>
             </a:fld>
             <a:endParaRPr lang="zh-CN" altLang="en-US"/>
           </a:p>
@@ -3043,7 +3147,7 @@
           <a:p>
             <a:fld id="{CAB93D9D-5A04-45BF-B8B1-4218537275FF}" type="datetimeFigureOut">
               <a:rPr lang="zh-CN" altLang="en-US" smtClean="0"/>
-              <a:t>2026/3/11</a:t>
+              <a:t>2026/4/2</a:t>
             </a:fld>
             <a:endParaRPr lang="zh-CN" altLang="en-US"/>
           </a:p>
@@ -3455,7 +3559,7 @@
           <a:p>
             <a:fld id="{CAB93D9D-5A04-45BF-B8B1-4218537275FF}" type="datetimeFigureOut">
               <a:rPr lang="zh-CN" altLang="en-US" smtClean="0"/>
-              <a:t>2026/3/11</a:t>
+              <a:t>2026/4/2</a:t>
             </a:fld>
             <a:endParaRPr lang="zh-CN" altLang="en-US"/>
           </a:p>
@@ -3596,7 +3700,7 @@
           <a:p>
             <a:fld id="{CAB93D9D-5A04-45BF-B8B1-4218537275FF}" type="datetimeFigureOut">
               <a:rPr lang="zh-CN" altLang="en-US" smtClean="0"/>
-              <a:t>2026/3/11</a:t>
+              <a:t>2026/4/2</a:t>
             </a:fld>
             <a:endParaRPr lang="zh-CN" altLang="en-US"/>
           </a:p>
@@ -3709,7 +3813,7 @@
           <a:p>
             <a:fld id="{CAB93D9D-5A04-45BF-B8B1-4218537275FF}" type="datetimeFigureOut">
               <a:rPr lang="zh-CN" altLang="en-US" smtClean="0"/>
-              <a:t>2026/3/11</a:t>
+              <a:t>2026/4/2</a:t>
             </a:fld>
             <a:endParaRPr lang="zh-CN" altLang="en-US"/>
           </a:p>
@@ -4020,7 +4124,7 @@
           <a:p>
             <a:fld id="{CAB93D9D-5A04-45BF-B8B1-4218537275FF}" type="datetimeFigureOut">
               <a:rPr lang="zh-CN" altLang="en-US" smtClean="0"/>
-              <a:t>2026/3/11</a:t>
+              <a:t>2026/4/2</a:t>
             </a:fld>
             <a:endParaRPr lang="zh-CN" altLang="en-US"/>
           </a:p>
@@ -4308,7 +4412,7 @@
           <a:p>
             <a:fld id="{CAB93D9D-5A04-45BF-B8B1-4218537275FF}" type="datetimeFigureOut">
               <a:rPr lang="zh-CN" altLang="en-US" smtClean="0"/>
-              <a:t>2026/3/11</a:t>
+              <a:t>2026/4/2</a:t>
             </a:fld>
             <a:endParaRPr lang="zh-CN" altLang="en-US"/>
           </a:p>
@@ -4549,7 +4653,7 @@
           <a:p>
             <a:fld id="{CAB93D9D-5A04-45BF-B8B1-4218537275FF}" type="datetimeFigureOut">
               <a:rPr lang="zh-CN" altLang="en-US" smtClean="0"/>
-              <a:t>2026/3/11</a:t>
+              <a:t>2026/4/2</a:t>
             </a:fld>
             <a:endParaRPr lang="zh-CN" altLang="en-US"/>
           </a:p>
@@ -5139,7 +5243,7 @@
             <p:nvPr/>
           </p:nvPicPr>
           <p:blipFill>
-            <a:blip r:embed="rId2">
+            <a:blip>
               <a:extLst>
                 <a:ext uri="{96DAC541-7B7A-43D3-8B79-37D633B846F1}">
                   <asvg:svgBlip xmlns:asvg="http://schemas.microsoft.com/office/drawing/2016/SVG/main" r:embed="rId3"/>
@@ -5416,10 +5520,10 @@
             <p:nvPr/>
           </p:nvPicPr>
           <p:blipFill>
-            <a:blip r:embed="rId4">
+            <a:blip>
               <a:extLst>
                 <a:ext uri="{96DAC541-7B7A-43D3-8B79-37D633B846F1}">
-                  <asvg:svgBlip xmlns:asvg="http://schemas.microsoft.com/office/drawing/2016/SVG/main" r:embed="rId5"/>
+                  <asvg:svgBlip xmlns:asvg="http://schemas.microsoft.com/office/drawing/2016/SVG/main" r:embed="rId4"/>
                 </a:ext>
               </a:extLst>
             </a:blip>
@@ -6721,10 +6825,10 @@
             <p:nvPr/>
           </p:nvPicPr>
           <p:blipFill>
-            <a:blip r:embed="rId2">
+            <a:blip>
               <a:extLst>
                 <a:ext uri="{96DAC541-7B7A-43D3-8B79-37D633B846F1}">
-                  <asvg:svgBlip xmlns:asvg="http://schemas.microsoft.com/office/drawing/2016/SVG/main" r:embed="rId3"/>
+                  <asvg:svgBlip xmlns:asvg="http://schemas.microsoft.com/office/drawing/2016/SVG/main" r:embed="rId2"/>
                 </a:ext>
               </a:extLst>
             </a:blip>
@@ -6998,10 +7102,10 @@
             <p:nvPr/>
           </p:nvPicPr>
           <p:blipFill>
-            <a:blip r:embed="rId4">
+            <a:blip>
               <a:extLst>
                 <a:ext uri="{96DAC541-7B7A-43D3-8B79-37D633B846F1}">
-                  <asvg:svgBlip xmlns:asvg="http://schemas.microsoft.com/office/drawing/2016/SVG/main" r:embed="rId5"/>
+                  <asvg:svgBlip xmlns:asvg="http://schemas.microsoft.com/office/drawing/2016/SVG/main" r:embed="rId3"/>
                 </a:ext>
               </a:extLst>
             </a:blip>
@@ -8314,10 +8418,10 @@
             <p:nvPr/>
           </p:nvPicPr>
           <p:blipFill>
-            <a:blip r:embed="rId3">
+            <a:blip>
               <a:extLst>
                 <a:ext uri="{96DAC541-7B7A-43D3-8B79-37D633B846F1}">
-                  <asvg:svgBlip xmlns:asvg="http://schemas.microsoft.com/office/drawing/2016/SVG/main" r:embed="rId4"/>
+                  <asvg:svgBlip xmlns:asvg="http://schemas.microsoft.com/office/drawing/2016/SVG/main" r:embed="rId3"/>
                 </a:ext>
               </a:extLst>
             </a:blip>
@@ -8591,10 +8695,10 @@
             <p:nvPr/>
           </p:nvPicPr>
           <p:blipFill>
-            <a:blip r:embed="rId5">
+            <a:blip>
               <a:extLst>
                 <a:ext uri="{96DAC541-7B7A-43D3-8B79-37D633B846F1}">
-                  <asvg:svgBlip xmlns:asvg="http://schemas.microsoft.com/office/drawing/2016/SVG/main" r:embed="rId6"/>
+                  <asvg:svgBlip xmlns:asvg="http://schemas.microsoft.com/office/drawing/2016/SVG/main" r:embed="rId4"/>
                 </a:ext>
               </a:extLst>
             </a:blip>
@@ -8990,7 +9094,7 @@
           <p:nvPr/>
         </p:nvPicPr>
         <p:blipFill>
-          <a:blip r:embed="rId7"/>
+          <a:blip r:embed="rId5"/>
           <a:stretch>
             <a:fillRect/>
           </a:stretch>
@@ -9020,7 +9124,7 @@
           <p:nvPr/>
         </p:nvPicPr>
         <p:blipFill>
-          <a:blip r:embed="rId8"/>
+          <a:blip r:embed="rId6"/>
           <a:stretch>
             <a:fillRect/>
           </a:stretch>
@@ -9059,7 +9163,7 @@
         </p:xfrm>
         <a:graphic>
           <a:graphicData uri="http://schemas.openxmlformats.org/drawingml/2006/chart">
-            <c:chart xmlns:c="http://schemas.openxmlformats.org/drawingml/2006/chart" xmlns:r="http://schemas.openxmlformats.org/officeDocument/2006/relationships" r:id="rId9"/>
+            <c:chart xmlns:c="http://schemas.openxmlformats.org/drawingml/2006/chart" xmlns:r="http://schemas.openxmlformats.org/officeDocument/2006/relationships" r:id="rId7"/>
           </a:graphicData>
         </a:graphic>
       </p:graphicFrame>
@@ -9277,10 +9381,10 @@
             <p:nvPr/>
           </p:nvPicPr>
           <p:blipFill>
-            <a:blip r:embed="rId2">
+            <a:blip>
               <a:extLst>
                 <a:ext uri="{96DAC541-7B7A-43D3-8B79-37D633B846F1}">
-                  <asvg:svgBlip xmlns:asvg="http://schemas.microsoft.com/office/drawing/2016/SVG/main" r:embed="rId3"/>
+                  <asvg:svgBlip xmlns:asvg="http://schemas.microsoft.com/office/drawing/2016/SVG/main" r:embed="rId2"/>
                 </a:ext>
               </a:extLst>
             </a:blip>
@@ -9554,10 +9658,10 @@
             <p:nvPr/>
           </p:nvPicPr>
           <p:blipFill>
-            <a:blip r:embed="rId4">
+            <a:blip>
               <a:extLst>
                 <a:ext uri="{96DAC541-7B7A-43D3-8B79-37D633B846F1}">
-                  <asvg:svgBlip xmlns:asvg="http://schemas.microsoft.com/office/drawing/2016/SVG/main" r:embed="rId5"/>
+                  <asvg:svgBlip xmlns:asvg="http://schemas.microsoft.com/office/drawing/2016/SVG/main" r:embed="rId3"/>
                 </a:ext>
               </a:extLst>
             </a:blip>
@@ -11358,10 +11462,10 @@
           <p:nvPr/>
         </p:nvPicPr>
         <p:blipFill>
-          <a:blip r:embed="rId3">
+          <a:blip>
             <a:extLst>
               <a:ext uri="{96DAC541-7B7A-43D3-8B79-37D633B846F1}">
-                <asvg:svgBlip xmlns:asvg="http://schemas.microsoft.com/office/drawing/2016/SVG/main" r:embed="rId4"/>
+                <asvg:svgBlip xmlns:asvg="http://schemas.microsoft.com/office/drawing/2016/SVG/main" r:embed="rId3"/>
               </a:ext>
             </a:extLst>
           </a:blip>
@@ -11394,7 +11498,7 @@
           <p:nvPr/>
         </p:nvPicPr>
         <p:blipFill>
-          <a:blip r:embed="rId5"/>
+          <a:blip r:embed="rId4"/>
           <a:stretch>
             <a:fillRect/>
           </a:stretch>
@@ -11676,10 +11780,10 @@
             <p:nvPr/>
           </p:nvPicPr>
           <p:blipFill>
-            <a:blip r:embed="rId2">
+            <a:blip>
               <a:extLst>
                 <a:ext uri="{96DAC541-7B7A-43D3-8B79-37D633B846F1}">
-                  <asvg:svgBlip xmlns:asvg="http://schemas.microsoft.com/office/drawing/2016/SVG/main" r:embed="rId3"/>
+                  <asvg:svgBlip xmlns:asvg="http://schemas.microsoft.com/office/drawing/2016/SVG/main" r:embed="rId2"/>
                 </a:ext>
               </a:extLst>
             </a:blip>
@@ -11953,10 +12057,10 @@
             <p:nvPr/>
           </p:nvPicPr>
           <p:blipFill>
-            <a:blip r:embed="rId4">
+            <a:blip>
               <a:extLst>
                 <a:ext uri="{96DAC541-7B7A-43D3-8B79-37D633B846F1}">
-                  <asvg:svgBlip xmlns:asvg="http://schemas.microsoft.com/office/drawing/2016/SVG/main" r:embed="rId5"/>
+                  <asvg:svgBlip xmlns:asvg="http://schemas.microsoft.com/office/drawing/2016/SVG/main" r:embed="rId3"/>
                 </a:ext>
               </a:extLst>
             </a:blip>
